--- a/courseware/202612_ADS_W14_AI_Literacy_Exam_Recap.pptx
+++ b/courseware/202612_ADS_W14_AI_Literacy_Exam_Recap.pptx
@@ -9707,7 +9707,7 @@
                 <a:ea typeface="Microsoft YaHei" pitchFamily="34" charset="-122"/>
                 <a:cs typeface="Microsoft YaHei" pitchFamily="34" charset="-120"/>
               </a:rPr>
-              <a:t>T1</a:t>
+              <a:t>E29945</a:t>
             </a:r>
             <a:endParaRPr lang="en-US" sz="1200" dirty="0"/>
           </a:p>
@@ -9746,7 +9746,7 @@
                 <a:ea typeface="Microsoft YaHei" pitchFamily="34" charset="-122"/>
                 <a:cs typeface="Microsoft YaHei" pitchFamily="34" charset="-120"/>
               </a:rPr>
-              <a:t>课程互选统计</a:t>
+              <a:t>神秘数字的宇宙旅行</a:t>
             </a:r>
             <a:endParaRPr lang="en-US" sz="1300" dirty="0"/>
           </a:p>
@@ -9785,7 +9785,7 @@
                 <a:ea typeface="Microsoft YaHei" pitchFamily="34" charset="-122"/>
                 <a:cs typeface="Microsoft YaHei" pitchFamily="34" charset="-120"/>
               </a:rPr>
-              <a:t>字典/集合/排序 · W4</a:t>
+              <a:t>模拟 / Collatz 轨迹</a:t>
             </a:r>
             <a:endParaRPr lang="en-US" sz="1100" dirty="0"/>
           </a:p>
@@ -9907,7 +9907,7 @@
                 <a:ea typeface="Microsoft YaHei" pitchFamily="34" charset="-122"/>
                 <a:cs typeface="Microsoft YaHei" pitchFamily="34" charset="-120"/>
               </a:rPr>
-              <a:t>T2</a:t>
+              <a:t>E29946</a:t>
             </a:r>
             <a:endParaRPr lang="en-US" sz="1200" dirty="0"/>
           </a:p>
@@ -9946,7 +9946,7 @@
                 <a:ea typeface="Microsoft YaHei" pitchFamily="34" charset="-122"/>
                 <a:cs typeface="Microsoft YaHei" pitchFamily="34" charset="-120"/>
               </a:rPr>
-              <a:t>最优装载顺序</a:t>
+              <a:t>删数问题</a:t>
             </a:r>
             <a:endParaRPr lang="en-US" sz="1300" dirty="0"/>
           </a:p>
@@ -9985,7 +9985,7 @@
                 <a:ea typeface="Microsoft YaHei" pitchFamily="34" charset="-122"/>
                 <a:cs typeface="Microsoft YaHei" pitchFamily="34" charset="-120"/>
               </a:rPr>
-              <a:t>贪心+交换论证 · W6/W10</a:t>
+              <a:t>单调栈、贪心</a:t>
             </a:r>
             <a:endParaRPr lang="en-US" sz="1100" dirty="0"/>
           </a:p>
@@ -10107,7 +10107,7 @@
                 <a:ea typeface="Microsoft YaHei" pitchFamily="34" charset="-122"/>
                 <a:cs typeface="Microsoft YaHei" pitchFamily="34" charset="-120"/>
               </a:rPr>
-              <a:t>T3</a:t>
+              <a:t>E30091</a:t>
             </a:r>
             <a:endParaRPr lang="en-US" sz="1200" dirty="0"/>
           </a:p>
@@ -10146,7 +10146,7 @@
                 <a:ea typeface="Microsoft YaHei" pitchFamily="34" charset="-122"/>
                 <a:cs typeface="Microsoft YaHei" pitchFamily="34" charset="-120"/>
               </a:rPr>
-              <a:t>网格中的宝藏</a:t>
+              <a:t>缺德的图书馆管理员</a:t>
             </a:r>
             <a:endParaRPr lang="en-US" sz="1300" dirty="0"/>
           </a:p>
@@ -10185,7 +10185,7 @@
                 <a:ea typeface="Microsoft YaHei" pitchFamily="34" charset="-122"/>
                 <a:cs typeface="Microsoft YaHei" pitchFamily="34" charset="-120"/>
               </a:rPr>
-              <a:t>带状态 BFS · W12</a:t>
+              <a:t>模拟 / 贪心</a:t>
             </a:r>
             <a:endParaRPr lang="en-US" sz="1100" dirty="0"/>
           </a:p>
@@ -10307,7 +10307,7 @@
                 <a:ea typeface="Microsoft YaHei" pitchFamily="34" charset="-122"/>
                 <a:cs typeface="Microsoft YaHei" pitchFamily="34" charset="-120"/>
               </a:rPr>
-              <a:t>T4</a:t>
+              <a:t>M27371</a:t>
             </a:r>
             <a:endParaRPr lang="en-US" sz="1200" dirty="0"/>
           </a:p>
@@ -10346,7 +10346,7 @@
                 <a:ea typeface="Microsoft YaHei" pitchFamily="34" charset="-122"/>
                 <a:cs typeface="Microsoft YaHei" pitchFamily="34" charset="-120"/>
               </a:rPr>
-              <a:t>分组考试</a:t>
+              <a:t>Playfair密码</a:t>
             </a:r>
             <a:endParaRPr lang="en-US" sz="1300" dirty="0"/>
           </a:p>
@@ -10385,7 +10385,7 @@
                 <a:ea typeface="Microsoft YaHei" pitchFamily="34" charset="-122"/>
                 <a:cs typeface="Microsoft YaHei" pitchFamily="34" charset="-120"/>
               </a:rPr>
-              <a:t>DP+前缀和 · W10/W11</a:t>
+              <a:t>字符串、矩阵模拟</a:t>
             </a:r>
             <a:endParaRPr lang="en-US" sz="1100" dirty="0"/>
           </a:p>
@@ -10507,7 +10507,7 @@
                 <a:ea typeface="Microsoft YaHei" pitchFamily="34" charset="-122"/>
                 <a:cs typeface="Microsoft YaHei" pitchFamily="34" charset="-120"/>
               </a:rPr>
-              <a:t>T5</a:t>
+              <a:t>T30201</a:t>
             </a:r>
             <a:endParaRPr lang="en-US" sz="1200" dirty="0"/>
           </a:p>
@@ -10546,7 +10546,7 @@
                 <a:ea typeface="Microsoft YaHei" pitchFamily="34" charset="-122"/>
                 <a:cs typeface="Microsoft YaHei" pitchFamily="34" charset="-120"/>
               </a:rPr>
-              <a:t>书架分层</a:t>
+              <a:t>旅行售货商问题</a:t>
             </a:r>
             <a:endParaRPr lang="en-US" sz="1300" dirty="0"/>
           </a:p>
@@ -10585,7 +10585,7 @@
                 <a:ea typeface="Microsoft YaHei" pitchFamily="34" charset="-122"/>
                 <a:cs typeface="Microsoft YaHei" pitchFamily="34" charset="-120"/>
               </a:rPr>
-              <a:t>二分答案+贪心校验 · W12/W13</a:t>
+              <a:t>状态压缩 DP</a:t>
             </a:r>
             <a:endParaRPr lang="en-US" sz="1100" dirty="0"/>
           </a:p>
@@ -10707,7 +10707,7 @@
                 <a:ea typeface="Microsoft YaHei" pitchFamily="34" charset="-122"/>
                 <a:cs typeface="Microsoft YaHei" pitchFamily="34" charset="-120"/>
               </a:rPr>
-              <a:t>T6</a:t>
+              <a:t>T30204</a:t>
             </a:r>
             <a:endParaRPr lang="en-US" sz="1200" dirty="0"/>
           </a:p>
@@ -10746,7 +10746,7 @@
                 <a:ea typeface="Microsoft YaHei" pitchFamily="34" charset="-122"/>
                 <a:cs typeface="Microsoft YaHei" pitchFamily="34" charset="-120"/>
               </a:rPr>
-              <a:t>敌友阵营</a:t>
+              <a:t>小P的LLM推理加速</a:t>
             </a:r>
             <a:endParaRPr lang="en-US" sz="1300" dirty="0"/>
           </a:p>
@@ -10785,7 +10785,7 @@
                 <a:ea typeface="Microsoft YaHei" pitchFamily="34" charset="-122"/>
                 <a:cs typeface="Microsoft YaHei" pitchFamily="34" charset="-120"/>
               </a:rPr>
-              <a:t>扩展域并查集 · W09</a:t>
+              <a:t>周期能耗、贪心</a:t>
             </a:r>
             <a:endParaRPr lang="en-US" sz="1100" dirty="0"/>
           </a:p>

--- a/courseware/202612_ADS_W14_AI_Literacy_Exam_Recap.pptx
+++ b/courseware/202612_ADS_W14_AI_Literacy_Exam_Recap.pptx
@@ -12316,7 +12316,7 @@
                 <a:ea typeface="Microsoft YaHei" pitchFamily="34" charset="-122"/>
                 <a:cs typeface="Microsoft YaHei" pitchFamily="34" charset="-120"/>
               </a:rPr>
-              <a:t>六道题对应六个高频坑：并列不处理、排序键靠猜、状态少一维……</a:t>
+              <a:t>六道题对应六个高频坑：格式没逐字对齐、删不满 k、没看出相遇等价……</a:t>
             </a:r>
             <a:r>
               <a:rPr lang="en-US" sz="1150" b="1" dirty="0">
@@ -21528,7 +21528,7 @@
                           <a:ea typeface="Microsoft YaHei" pitchFamily="34" charset="-122"/>
                           <a:cs typeface="Microsoft YaHei" pitchFamily="34" charset="-120"/>
                         </a:rPr>
-                        <a:t>完成一页 A4 cheat sheet</a:t>
+                        <a:t>完成十页 A4 cheat sheet</a:t>
                       </a:r>
                       <a:endParaRPr lang="en-US" sz="1150" dirty="0">
                         <a:latin typeface="Microsoft YaHei" charset="0"/>
@@ -21596,7 +21596,7 @@
                           <a:ea typeface="Microsoft YaHei" pitchFamily="34" charset="-122"/>
                           <a:cs typeface="Microsoft YaHei" pitchFamily="34" charset="-120"/>
                         </a:rPr>
-                        <a:t>手写，双面</a:t>
+                        <a:t>双面，手写或打印</a:t>
                       </a:r>
                       <a:endParaRPr lang="en-US" sz="1150" dirty="0">
                         <a:latin typeface="Microsoft YaHei" charset="0"/>
@@ -22433,7 +22433,7 @@
                 <a:ea typeface="Microsoft YaHei" pitchFamily="34" charset="-122"/>
                 <a:cs typeface="Microsoft YaHei" pitchFamily="34" charset="-120"/>
               </a:rPr>
-              <a:t>思考题（1/4）</a:t>
+              <a:t>思考题（1/2）</a:t>
             </a:r>
             <a:endParaRPr lang="en-US" sz="2000" dirty="0"/>
           </a:p>
@@ -22832,7 +22832,7 @@
                 <a:ea typeface="Microsoft YaHei" pitchFamily="34" charset="-122"/>
                 <a:cs typeface="Microsoft YaHei" pitchFamily="34" charset="-120"/>
               </a:rPr>
-              <a:t>T2 的排序键若用浮点 t/w，在什么数据下会出问题？构造一组验证。</a:t>
+              <a:t>T2 删数问题的参考解答末尾为什么还要 stack[:-k]？构造一个扫描完 k 仍大于 0 的输入。</a:t>
             </a:r>
             <a:endParaRPr lang="en-US" sz="1150" dirty="0"/>
           </a:p>
@@ -22952,7 +22952,7 @@
                 <a:ea typeface="Microsoft YaHei" pitchFamily="34" charset="-122"/>
                 <a:cs typeface="Microsoft YaHei" pitchFamily="34" charset="-120"/>
               </a:rPr>
-              <a:t>T4 若改成「至多 k 段」，代码要改哪一行？答案会变大还是变小？</a:t>
+              <a:t>T3 里「相遇同时转身」为什么可以看成「互相穿过」？用 L=5、位置 2 4 手推验证。</a:t>
             </a:r>
             <a:endParaRPr lang="en-US" sz="1150" dirty="0"/>
           </a:p>
@@ -23830,7 +23830,7 @@
                 <a:ea typeface="Microsoft YaHei" pitchFamily="34" charset="-122"/>
                 <a:cs typeface="Microsoft YaHei" pitchFamily="34" charset="-120"/>
               </a:rPr>
-              <a:t>思考题（2/4）</a:t>
+              <a:t>思考题（2/2）</a:t>
             </a:r>
             <a:endParaRPr lang="en-US" sz="2000" dirty="0"/>
           </a:p>
@@ -23989,7 +23989,7 @@
                 <a:ea typeface="Microsoft YaHei" pitchFamily="34" charset="-122"/>
                 <a:cs typeface="Microsoft YaHei" pitchFamily="34" charset="-120"/>
               </a:rPr>
-              <a:t>T5 的判据若从 &lt;= k 改成 == k，在样例 5 3 / 1 2 3 4 5 上会输出什么？为什么？</a:t>
+              <a:t>T5 在 n = 18 时 dp 表有多少个状态？三重循环约多少次运算？Python 跑得完吗？</a:t>
             </a:r>
             <a:endParaRPr lang="en-US" sz="1200" dirty="0"/>
           </a:p>
@@ -24109,7 +24109,7 @@
                 <a:ea typeface="Microsoft YaHei" pitchFamily="34" charset="-122"/>
                 <a:cs typeface="Microsoft YaHei" pitchFamily="34" charset="-120"/>
               </a:rPr>
-              <a:t>T6 若允许 a == b（自己和自己是敌人），程序会怎样？该在哪一步拦住？</a:t>
+              <a:t>T6 固定总周期数 k 时，为什么 odd 必须与 k 同奇偶？可行性为什么对 k 单调、能二分？</a:t>
             </a:r>
             <a:endParaRPr lang="en-US" sz="1200" dirty="0"/>
           </a:p>
